--- a/docs/ppt-book/projets/Projet4-Soutenance-memoire.pptx
+++ b/docs/ppt-book/projets/Projet4-Soutenance-memoire.pptx
@@ -114,20 +114,20 @@
   <p:extLst>
     <p:ext uri="{521415D9-36F7-43E2-AB2F-B90AF26B5E84}">
       <p14:sectionLst xmlns:p14="http://schemas.microsoft.com/office/powerpoint/2010/main">
-        <p14:section name="التقديم" id="{99147f74-4bb9-36bb-db87-93cf6fa84ca7}">
+        <p14:section name="التقديم" id="{70ea5777-4429-355d-2c16-01eaa534600f}">
           <p14:sldIdLst>
             <p14:sldId id="256"/>
             <p14:sldId id="257"/>
           </p14:sldIdLst>
         </p14:section>
-        <p14:section name="الإطار" id="{e80ab7b1-fdf5-7019-6963-6aee7ba694ff}">
+        <p14:section name="الإطار" id="{3e670895-007c-ae97-f858-f66f675c9f29}">
           <p14:sldIdLst>
             <p14:sldId id="258"/>
             <p14:sldId id="259"/>
             <p14:sldId id="260"/>
           </p14:sldIdLst>
         </p14:section>
-        <p14:section name="النتائج" id="{3055105d-8311-1b95-3c2d-6f81eaf8aec7}">
+        <p14:section name="النتائج" id="{c622cfd7-abeb-d099-9a94-74a4ed7d26e6}">
           <p14:sldIdLst>
             <p14:sldId id="261"/>
             <p14:sldId id="262"/>
